--- a/brand/flex-qbr.pptx
+++ b/brand/flex-qbr.pptx
@@ -113,20 +113,20 @@
   <p:extLst>
     <p:ext uri="{521415D9-36F7-43E2-AB2F-B90AF26B5E84}">
       <p14:sectionLst xmlns:p14="http://schemas.microsoft.com/office/powerpoint/2010/main">
-        <p14:section name="Cover" id="{9540f085-3037-0ad7-6a9b-ec290692da50}">
+        <p14:section name="Cover" id="{1fc94357-5d0e-be43-965b-99302a7d8236}">
           <p14:sldIdLst>
             <p14:sldId id="256"/>
             <p14:sldId id="257"/>
           </p14:sldIdLst>
         </p14:section>
-        <p14:section name="Detail" id="{998de1f3-4575-b729-7b42-3f8aab943359}">
+        <p14:section name="Detail" id="{9c980906-4dea-caae-2889-8547d433856d}">
           <p14:sldIdLst>
             <p14:sldId id="258"/>
             <p14:sldId id="259"/>
             <p14:sldId id="260"/>
           </p14:sldIdLst>
         </p14:section>
-        <p14:section name="Ahead" id="{5b83764f-c380-ca74-9772-90ee86fd4773}">
+        <p14:section name="Ahead" id="{afed3109-3aed-77f3-375d-8a93443250f7}">
           <p14:sldIdLst>
             <p14:sldId id="261"/>
             <p14:sldId id="262"/>
@@ -1429,7 +1429,7 @@
         <p:spPr>
           <a:xfrm>
             <a:off x="658368" y="548640"/>
-            <a:ext cx="2292401" cy="726948"/>
+            <a:ext cx="2104949" cy="726948"/>
           </a:xfrm>
           <a:prstGeom prst="rect">
             <a:avLst/>
@@ -1700,7 +1700,7 @@
         <p:spPr>
           <a:xfrm>
             <a:off x="10332720" y="5852160"/>
-            <a:ext cx="1294790" cy="410566"/>
+            <a:ext cx="1188720" cy="410566"/>
           </a:xfrm>
           <a:prstGeom prst="rect">
             <a:avLst/>
@@ -1854,7 +1854,7 @@
         <p:spPr>
           <a:xfrm>
             <a:off x="10716768" y="6053328"/>
-            <a:ext cx="946404" cy="299923"/>
+            <a:ext cx="868680" cy="299923"/>
           </a:xfrm>
           <a:prstGeom prst="rect">
             <a:avLst/>
@@ -1988,7 +1988,7 @@
         <p:spPr>
           <a:xfrm>
             <a:off x="10716768" y="6053328"/>
-            <a:ext cx="946404" cy="299923"/>
+            <a:ext cx="868680" cy="299923"/>
           </a:xfrm>
           <a:prstGeom prst="rect">
             <a:avLst/>
@@ -2161,7 +2161,7 @@
         <p:spPr>
           <a:xfrm>
             <a:off x="10332720" y="5760720"/>
-            <a:ext cx="1294790" cy="410566"/>
+            <a:ext cx="1188720" cy="410566"/>
           </a:xfrm>
           <a:prstGeom prst="rect">
             <a:avLst/>
